--- a/entregas/posts/site/kit/editavel/efeito-rebote-qua-04-11.pptx
+++ b/entregas/posts/site/kit/editavel/efeito-rebote-qua-04-11.pptx
@@ -3820,7 +3820,7 @@
         </p:nvSpPr>
         <p:spPr>
           <a:xfrm>
-            <a:off x="915442" y="789152"/>
+            <a:off x="915442" y="866305"/>
             <a:ext cx="8083684" cy="894969"/>
           </a:xfrm>
           <a:prstGeom prst="rect">
@@ -3867,7 +3867,7 @@
         </p:nvSpPr>
         <p:spPr>
           <a:xfrm>
-            <a:off x="1326803" y="10240915"/>
+            <a:off x="1326803" y="10073442"/>
             <a:ext cx="8146986" cy="746013"/>
           </a:xfrm>
           <a:prstGeom prst="rect">
@@ -3914,7 +3914,7 @@
         </p:nvSpPr>
         <p:spPr>
           <a:xfrm>
-            <a:off x="1326803" y="11024136"/>
+            <a:off x="1326803" y="11087093"/>
             <a:ext cx="8083957" cy="482666"/>
           </a:xfrm>
           <a:prstGeom prst="rect">
@@ -4129,7 +4129,7 @@
         </p:nvSpPr>
         <p:spPr>
           <a:xfrm>
-            <a:off x="915442" y="1079840"/>
+            <a:off x="915442" y="1018941"/>
             <a:ext cx="1850335" cy="304495"/>
           </a:xfrm>
           <a:prstGeom prst="rect">
@@ -4155,13 +4155,13 @@
               </a:spcAft>
             </a:pPr>
             <a:r>
-              <a:rPr b="0" i="0" sz="2397" lang="pt-BR">
+              <a:rPr b="1" i="0" sz="2397" lang="pt-BR">
                 <a:solidFill>
                   <a:srgbClr val="B5121B"/>
                 </a:solidFill>
-                <a:latin typeface="Barlow SemiBold"/>
-                <a:ea typeface="Barlow SemiBold"/>
-                <a:cs typeface="Barlow SemiBold"/>
+                <a:latin typeface="Barlow"/>
+                <a:ea typeface="Barlow"/>
+                <a:cs typeface="Barlow"/>
               </a:rPr>
               <a:t>O que vimos</a:t>
             </a:r>
@@ -4176,7 +4176,7 @@
         </p:nvSpPr>
         <p:spPr>
           <a:xfrm>
-            <a:off x="915442" y="4868139"/>
+            <a:off x="915442" y="4658572"/>
             <a:ext cx="6159535" cy="1867049"/>
           </a:xfrm>
           <a:prstGeom prst="rect">
@@ -4235,7 +4235,7 @@
         </p:nvSpPr>
         <p:spPr>
           <a:xfrm>
-            <a:off x="915442" y="6965418"/>
+            <a:off x="915442" y="7037448"/>
             <a:ext cx="7819957" cy="1104454"/>
           </a:xfrm>
           <a:prstGeom prst="rect">
@@ -4282,7 +4282,7 @@
         </p:nvSpPr>
         <p:spPr>
           <a:xfrm>
-            <a:off x="915442" y="11515488"/>
+            <a:off x="915442" y="11496457"/>
             <a:ext cx="1723132" cy="437712"/>
           </a:xfrm>
           <a:prstGeom prst="rect">
@@ -4530,7 +4530,7 @@
         </p:nvSpPr>
         <p:spPr>
           <a:xfrm>
-            <a:off x="915442" y="1079840"/>
+            <a:off x="915442" y="1018941"/>
             <a:ext cx="1243950" cy="304495"/>
           </a:xfrm>
           <a:prstGeom prst="rect">
@@ -4556,13 +4556,13 @@
               </a:spcAft>
             </a:pPr>
             <a:r>
-              <a:rPr b="0" i="0" sz="2397" lang="pt-BR">
+              <a:rPr b="1" i="0" sz="2397" lang="pt-BR">
                 <a:solidFill>
                   <a:srgbClr val="B5121B"/>
                 </a:solidFill>
-                <a:latin typeface="Barlow SemiBold"/>
-                <a:ea typeface="Barlow SemiBold"/>
-                <a:cs typeface="Barlow SemiBold"/>
+                <a:latin typeface="Barlow"/>
+                <a:ea typeface="Barlow"/>
+                <a:cs typeface="Barlow"/>
               </a:rPr>
               <a:t>Entrega</a:t>
             </a:r>
@@ -4577,7 +4577,7 @@
         </p:nvSpPr>
         <p:spPr>
           <a:xfrm>
-            <a:off x="915442" y="4935261"/>
+            <a:off x="915442" y="4725694"/>
             <a:ext cx="7076316" cy="933524"/>
           </a:xfrm>
           <a:prstGeom prst="rect">
@@ -4624,7 +4624,7 @@
         </p:nvSpPr>
         <p:spPr>
           <a:xfrm>
-            <a:off x="1353145" y="6498693"/>
+            <a:off x="1353145" y="6570723"/>
             <a:ext cx="6685737" cy="1104454"/>
           </a:xfrm>
           <a:prstGeom prst="rect">
@@ -4671,7 +4671,7 @@
         </p:nvSpPr>
         <p:spPr>
           <a:xfrm>
-            <a:off x="915442" y="11515488"/>
+            <a:off x="915442" y="11496457"/>
             <a:ext cx="1849517" cy="437712"/>
           </a:xfrm>
           <a:prstGeom prst="rect">
@@ -4799,7 +4799,7 @@
         </p:nvSpPr>
         <p:spPr>
           <a:xfrm>
-            <a:off x="4436313" y="5430830"/>
+            <a:off x="4436313" y="5369931"/>
             <a:ext cx="1414373" cy="304495"/>
           </a:xfrm>
           <a:prstGeom prst="rect">
@@ -4825,13 +4825,13 @@
               </a:spcAft>
             </a:pPr>
             <a:r>
-              <a:rPr b="0" i="0" sz="2397" lang="pt-BR">
+              <a:rPr b="1" i="0" sz="2397" lang="pt-BR">
                 <a:solidFill>
                   <a:srgbClr val="E9C46A"/>
                 </a:solidFill>
-                <a:latin typeface="Barlow SemiBold"/>
-                <a:ea typeface="Barlow SemiBold"/>
-                <a:cs typeface="Barlow SemiBold"/>
+                <a:latin typeface="Barlow"/>
+                <a:ea typeface="Barlow"/>
+                <a:cs typeface="Barlow"/>
               </a:rPr>
               <a:t>Obrigado</a:t>
             </a:r>
@@ -4846,7 +4846,7 @@
         </p:nvSpPr>
         <p:spPr>
           <a:xfrm>
-            <a:off x="495791" y="6199556"/>
+            <a:off x="495791" y="5989989"/>
             <a:ext cx="9295418" cy="1867049"/>
           </a:xfrm>
           <a:prstGeom prst="rect">
@@ -4905,7 +4905,7 @@
         </p:nvSpPr>
         <p:spPr>
           <a:xfrm>
-            <a:off x="2531872" y="8670860"/>
+            <a:off x="2531872" y="8572105"/>
             <a:ext cx="5223108" cy="493776"/>
           </a:xfrm>
           <a:prstGeom prst="rect">
